--- a/classes/parte-7-red-team-y-operaciones-ofensivas/161-red-team-vs-pentest-filosofia-y-objetivos/clase-161-presentacion.pptx
+++ b/classes/parte-7-red-team-y-operaciones-ofensivas/161-red-team-vs-pentest-filosofia-y-objetivos/clase-161-presentacion.pptx
@@ -17,6 +17,9 @@
     <p:sldId id="265" r:id="rId16"/>
     <p:sldId id="266" r:id="rId17"/>
     <p:sldId id="267" r:id="rId18"/>
+    <p:sldId id="268" r:id="rId19"/>
+    <p:sldId id="269" r:id="rId20"/>
+    <p:sldId id="270" r:id="rId21"/>
   </p:sldIdLst>
   <p:sldSz cx="9144000" cy="6858000" type="screen4x3"/>
   <p:notesSz cx="6858000" cy="9144000"/>
@@ -3198,7 +3201,7 @@
                   <a:srgbClr val="0B3D2E"/>
                 </a:solidFill>
               </a:rPr>
-              <a:t>⚠️ Errores comunes</a:t>
+              <a:t>✍️ Ejercicios</a:t>
             </a:r>
           </a:p>
         </p:txBody>
@@ -3236,67 +3239,82 @@
                   <a:srgbClr val="22282E"/>
                 </a:solidFill>
               </a:rPr>
-              <a:t>•  El cliente esperaba "todas las vulnerabilidades" — Se vendió Red Team pero se necesitaba un pentest; alinea expectativas antes de firmar</a:t>
-            </a:r>
-          </a:p>
-          <a:p>
-            <a:pPr>
-              <a:spcAft>
-                <a:spcPts val="600"/>
-              </a:spcAft>
-            </a:pPr>
-            <a:r>
-              <a:rPr sz="1500">
-                <a:solidFill>
-                  <a:srgbClr val="22282E"/>
-                </a:solidFill>
-              </a:rPr>
-              <a:t>•  El equipo dispara alarmas y cunde el pánico — Falta deconfliction; establece un canal y un código con la white cell</a:t>
-            </a:r>
-          </a:p>
-          <a:p>
-            <a:pPr>
-              <a:spcAft>
-                <a:spcPts val="600"/>
-              </a:spcAft>
-            </a:pPr>
-            <a:r>
-              <a:rPr sz="1500">
-                <a:solidFill>
-                  <a:srgbClr val="22282E"/>
-                </a:solidFill>
-              </a:rPr>
-              <a:t>•  El ejercicio se sale de alcance — RoE vagas; especifica sistemas, técnicas y ventanas con precisión</a:t>
-            </a:r>
-          </a:p>
-          <a:p>
-            <a:pPr>
-              <a:spcAft>
-                <a:spcPts val="600"/>
-              </a:spcAft>
-            </a:pPr>
-            <a:r>
-              <a:rPr sz="1500">
-                <a:solidFill>
-                  <a:srgbClr val="22282E"/>
-                </a:solidFill>
-              </a:rPr>
-              <a:t>•  No hay forma de decir si "salió bien" — Objetivos no verificables; define flags concretas y medibles</a:t>
-            </a:r>
-          </a:p>
-          <a:p>
-            <a:pPr>
-              <a:spcAft>
-                <a:spcPts val="600"/>
-              </a:spcAft>
-            </a:pPr>
-            <a:r>
-              <a:rPr sz="1500">
-                <a:solidFill>
-                  <a:srgbClr val="22282E"/>
-                </a:solidFill>
-              </a:rPr>
-              <a:t>•  Se toca producción crítica — Falta lista de exclusiones; marca sistemas prohibidos explícitamente</a:t>
+              <a:t>•  Escribe en una tabla las 5 diferencias más importantes entre pentest y Red Team.</a:t>
+            </a:r>
+          </a:p>
+          <a:p>
+            <a:pPr>
+              <a:spcAft>
+                <a:spcPts val="600"/>
+              </a:spcAft>
+            </a:pPr>
+            <a:r>
+              <a:rPr sz="1500">
+                <a:solidFill>
+                  <a:srgbClr val="22282E"/>
+                </a:solidFill>
+              </a:rPr>
+              <a:t>•  Redacta un objetivo de negocio y tres flags técnicas derivadas para una empresa de e-commerce.</a:t>
+            </a:r>
+          </a:p>
+          <a:p>
+            <a:pPr>
+              <a:spcAft>
+                <a:spcPts val="600"/>
+              </a:spcAft>
+            </a:pPr>
+            <a:r>
+              <a:rPr sz="1500">
+                <a:solidFill>
+                  <a:srgbClr val="22282E"/>
+                </a:solidFill>
+              </a:rPr>
+              <a:t>•  Enumera 8 cláusulas que consideres imprescindibles en unas RoE y justifica dos de ellas.</a:t>
+            </a:r>
+          </a:p>
+          <a:p>
+            <a:pPr>
+              <a:spcAft>
+                <a:spcPts val="600"/>
+              </a:spcAft>
+            </a:pPr>
+            <a:r>
+              <a:rPr sz="1500">
+                <a:solidFill>
+                  <a:srgbClr val="22282E"/>
+                </a:solidFill>
+              </a:rPr>
+              <a:t>•  Argumenta cuándo un assumed breach es mejor que un ataque desde cero, con un ejemplo.</a:t>
+            </a:r>
+          </a:p>
+          <a:p>
+            <a:pPr>
+              <a:spcAft>
+                <a:spcPts val="600"/>
+              </a:spcAft>
+            </a:pPr>
+            <a:r>
+              <a:rPr sz="1500">
+                <a:solidFill>
+                  <a:srgbClr val="22282E"/>
+                </a:solidFill>
+              </a:rPr>
+              <a:t>•  Diseña una tabla de métricas (TTD/TTR/cobertura) con valores objetivo razonables.</a:t>
+            </a:r>
+          </a:p>
+          <a:p>
+            <a:pPr>
+              <a:spcAft>
+                <a:spcPts val="600"/>
+              </a:spcAft>
+            </a:pPr>
+            <a:r>
+              <a:rPr sz="1500">
+                <a:solidFill>
+                  <a:srgbClr val="22282E"/>
+                </a:solidFill>
+              </a:rPr>
+              <a:t>•  Explica qué es la "deconfliction" y describe un procedimiento para evitar un incidente real innecesario.</a:t>
             </a:r>
           </a:p>
         </p:txBody>
@@ -3347,7 +3365,7 @@
                   <a:srgbClr val="0B3D2E"/>
                 </a:solidFill>
               </a:rPr>
-              <a:t>❓ Preguntas frecuentes</a:t>
+              <a:t>📝 Reto verificable</a:t>
             </a:r>
           </a:p>
         </p:txBody>
@@ -3385,82 +3403,22 @@
                   <a:srgbClr val="22282E"/>
                 </a:solidFill>
               </a:rPr>
-              <a:t>•  ❓ ¿Un Red Team siempre es "mejor" que un pentest?</a:t>
-            </a:r>
-          </a:p>
-          <a:p>
-            <a:pPr>
-              <a:spcAft>
-                <a:spcPts val="600"/>
-              </a:spcAft>
-            </a:pPr>
-            <a:r>
-              <a:rPr sz="1500">
-                <a:solidFill>
-                  <a:srgbClr val="22282E"/>
-                </a:solidFill>
-              </a:rPr>
-              <a:t>•  No. Si una organización aún no parchea lo básico, un pentest da más valor. El Red Team evalúa detección/respuesta; solo tiene sentido cuando ya existe una capacidad defensiva que medir.</a:t>
-            </a:r>
-          </a:p>
-          <a:p>
-            <a:pPr>
-              <a:spcAft>
-                <a:spcPts val="600"/>
-              </a:spcAft>
-            </a:pPr>
-            <a:r>
-              <a:rPr sz="1500">
-                <a:solidFill>
-                  <a:srgbClr val="22282E"/>
-                </a:solidFill>
-              </a:rPr>
-              <a:t>•  ❓ ¿Qué es "purple team" en este contexto?</a:t>
-            </a:r>
-          </a:p>
-          <a:p>
-            <a:pPr>
-              <a:spcAft>
-                <a:spcPts val="600"/>
-              </a:spcAft>
-            </a:pPr>
-            <a:r>
-              <a:rPr sz="1500">
-                <a:solidFill>
-                  <a:srgbClr val="22282E"/>
-                </a:solidFill>
-              </a:rPr>
-              <a:t>•  Cuando Red y Blue colaboran en tiempo real para mejorar detecciones. Lo veremos en la Clase 178; aquí basta saber que es el destino natural del valor del ejercicio.</a:t>
-            </a:r>
-          </a:p>
-          <a:p>
-            <a:pPr>
-              <a:spcAft>
-                <a:spcPts val="600"/>
-              </a:spcAft>
-            </a:pPr>
-            <a:r>
-              <a:rPr sz="1500">
-                <a:solidFill>
-                  <a:srgbClr val="22282E"/>
-                </a:solidFill>
-              </a:rPr>
-              <a:t>•  ❓ ¿El assumed breach no "hace trampa"?</a:t>
-            </a:r>
-          </a:p>
-          <a:p>
-            <a:pPr>
-              <a:spcAft>
-                <a:spcPts val="600"/>
-              </a:spcAft>
-            </a:pPr>
-            <a:r>
-              <a:rPr sz="1500">
-                <a:solidFill>
-                  <a:srgbClr val="22282E"/>
-                </a:solidFill>
-              </a:rPr>
-              <a:t>•  No: reconoce que el phishing eventualmente funciona y enfoca el presupuesto en lo que de verdad se quiere evaluar (¿detectamos y respondemos una vez dentro?).</a:t>
+              <a:t>•  Produce un documento de una página ("Operation Charter") para ACME Corp que contenga: objetivo de negocio, 3 flags, tipo de inicio, 6 RoE, un plan de deconfliction y 3 métricas de éxito.</a:t>
+            </a:r>
+          </a:p>
+          <a:p>
+            <a:pPr>
+              <a:spcAft>
+                <a:spcPts val="600"/>
+              </a:spcAft>
+            </a:pPr>
+            <a:r>
+              <a:rPr sz="1500">
+                <a:solidFill>
+                  <a:srgbClr val="22282E"/>
+                </a:solidFill>
+              </a:rPr>
+              <a:t>•  Criterio de aceptación: cualquier persona ajena podría leerlo y saber qué está autorizado, qué se persigue y cómo se medirá el éxito, sin ambigüedad.</a:t>
             </a:r>
           </a:p>
         </p:txBody>
@@ -3511,7 +3469,7 @@
                   <a:srgbClr val="0B3D2E"/>
                 </a:solidFill>
               </a:rPr>
-              <a:t>🔗 Referencias</a:t>
+              <a:t>⚠️ Errores comunes</a:t>
             </a:r>
           </a:p>
         </p:txBody>
@@ -3549,6 +3507,319 @@
                   <a:srgbClr val="22282E"/>
                 </a:solidFill>
               </a:rPr>
+              <a:t>•  El cliente esperaba "todas las vulnerabilidades" — Se vendió Red Team pero se necesitaba un pentest; alinea expectativas antes de firmar</a:t>
+            </a:r>
+          </a:p>
+          <a:p>
+            <a:pPr>
+              <a:spcAft>
+                <a:spcPts val="600"/>
+              </a:spcAft>
+            </a:pPr>
+            <a:r>
+              <a:rPr sz="1500">
+                <a:solidFill>
+                  <a:srgbClr val="22282E"/>
+                </a:solidFill>
+              </a:rPr>
+              <a:t>•  El equipo dispara alarmas y cunde el pánico — Falta deconfliction; establece un canal y un código con la white cell</a:t>
+            </a:r>
+          </a:p>
+          <a:p>
+            <a:pPr>
+              <a:spcAft>
+                <a:spcPts val="600"/>
+              </a:spcAft>
+            </a:pPr>
+            <a:r>
+              <a:rPr sz="1500">
+                <a:solidFill>
+                  <a:srgbClr val="22282E"/>
+                </a:solidFill>
+              </a:rPr>
+              <a:t>•  El ejercicio se sale de alcance — RoE vagas; especifica sistemas, técnicas y ventanas con precisión</a:t>
+            </a:r>
+          </a:p>
+          <a:p>
+            <a:pPr>
+              <a:spcAft>
+                <a:spcPts val="600"/>
+              </a:spcAft>
+            </a:pPr>
+            <a:r>
+              <a:rPr sz="1500">
+                <a:solidFill>
+                  <a:srgbClr val="22282E"/>
+                </a:solidFill>
+              </a:rPr>
+              <a:t>•  No hay forma de decir si "salió bien" — Objetivos no verificables; define flags concretas y medibles</a:t>
+            </a:r>
+          </a:p>
+          <a:p>
+            <a:pPr>
+              <a:spcAft>
+                <a:spcPts val="600"/>
+              </a:spcAft>
+            </a:pPr>
+            <a:r>
+              <a:rPr sz="1500">
+                <a:solidFill>
+                  <a:srgbClr val="22282E"/>
+                </a:solidFill>
+              </a:rPr>
+              <a:t>•  Se toca producción crítica — Falta lista de exclusiones; marca sistemas prohibidos explícitamente</a:t>
+            </a:r>
+          </a:p>
+        </p:txBody>
+      </p:sp>
+    </p:spTree>
+  </p:cSld>
+  <p:clrMapOvr>
+    <a:masterClrMapping/>
+  </p:clrMapOvr>
+</p:sld>
+</file>
+
+<file path=ppt/slides/slide13.xml><?xml version="1.0" encoding="utf-8"?>
+<p:sld xmlns:a="http://schemas.openxmlformats.org/drawingml/2006/main" xmlns:p="http://schemas.openxmlformats.org/presentationml/2006/main" xmlns:r="http://schemas.openxmlformats.org/officeDocument/2006/relationships">
+  <p:cSld>
+    <p:spTree>
+      <p:nvGrpSpPr>
+        <p:cNvPr id="1" name=""/>
+        <p:cNvGrpSpPr/>
+        <p:nvPr/>
+      </p:nvGrpSpPr>
+      <p:grpSpPr/>
+      <p:sp>
+        <p:nvSpPr>
+          <p:cNvPr id="2" name="TextBox 1"/>
+          <p:cNvSpPr txBox="1"/>
+          <p:nvPr/>
+        </p:nvSpPr>
+        <p:spPr>
+          <a:xfrm>
+            <a:off x="457200" y="320040"/>
+            <a:ext cx="8229600" cy="822960"/>
+          </a:xfrm>
+          <a:prstGeom prst="rect">
+            <a:avLst/>
+          </a:prstGeom>
+          <a:noFill/>
+        </p:spPr>
+        <p:txBody>
+          <a:bodyPr wrap="square">
+            <a:spAutoFit/>
+          </a:bodyPr>
+          <a:lstStyle/>
+          <a:p>
+            <a:r>
+              <a:rPr sz="2600" b="1">
+                <a:solidFill>
+                  <a:srgbClr val="0B3D2E"/>
+                </a:solidFill>
+              </a:rPr>
+              <a:t>❓ Preguntas frecuentes</a:t>
+            </a:r>
+          </a:p>
+        </p:txBody>
+      </p:sp>
+      <p:sp>
+        <p:nvSpPr>
+          <p:cNvPr id="3" name="TextBox 2"/>
+          <p:cNvSpPr txBox="1"/>
+          <p:nvPr/>
+        </p:nvSpPr>
+        <p:spPr>
+          <a:xfrm>
+            <a:off x="457200" y="1280160"/>
+            <a:ext cx="8229600" cy="4937760"/>
+          </a:xfrm>
+          <a:prstGeom prst="rect">
+            <a:avLst/>
+          </a:prstGeom>
+          <a:noFill/>
+        </p:spPr>
+        <p:txBody>
+          <a:bodyPr wrap="square">
+            <a:spAutoFit/>
+          </a:bodyPr>
+          <a:lstStyle/>
+          <a:p>
+            <a:pPr>
+              <a:spcAft>
+                <a:spcPts val="600"/>
+              </a:spcAft>
+            </a:pPr>
+            <a:r>
+              <a:rPr sz="1500">
+                <a:solidFill>
+                  <a:srgbClr val="22282E"/>
+                </a:solidFill>
+              </a:rPr>
+              <a:t>•  ❓ ¿Un Red Team siempre es "mejor" que un pentest?</a:t>
+            </a:r>
+          </a:p>
+          <a:p>
+            <a:pPr>
+              <a:spcAft>
+                <a:spcPts val="600"/>
+              </a:spcAft>
+            </a:pPr>
+            <a:r>
+              <a:rPr sz="1500">
+                <a:solidFill>
+                  <a:srgbClr val="22282E"/>
+                </a:solidFill>
+              </a:rPr>
+              <a:t>•  No. Si una organización aún no parchea lo básico, un pentest da más valor. El Red Team evalúa detección/respuesta; solo tiene sentido cuando ya existe una capacidad defensiva que medir.</a:t>
+            </a:r>
+          </a:p>
+          <a:p>
+            <a:pPr>
+              <a:spcAft>
+                <a:spcPts val="600"/>
+              </a:spcAft>
+            </a:pPr>
+            <a:r>
+              <a:rPr sz="1500">
+                <a:solidFill>
+                  <a:srgbClr val="22282E"/>
+                </a:solidFill>
+              </a:rPr>
+              <a:t>•  ❓ ¿Qué es "purple team" en este contexto?</a:t>
+            </a:r>
+          </a:p>
+          <a:p>
+            <a:pPr>
+              <a:spcAft>
+                <a:spcPts val="600"/>
+              </a:spcAft>
+            </a:pPr>
+            <a:r>
+              <a:rPr sz="1500">
+                <a:solidFill>
+                  <a:srgbClr val="22282E"/>
+                </a:solidFill>
+              </a:rPr>
+              <a:t>•  Cuando Red y Blue colaboran en tiempo real para mejorar detecciones. Lo veremos en la Clase 178; aquí basta saber que es el destino natural del valor del ejercicio.</a:t>
+            </a:r>
+          </a:p>
+          <a:p>
+            <a:pPr>
+              <a:spcAft>
+                <a:spcPts val="600"/>
+              </a:spcAft>
+            </a:pPr>
+            <a:r>
+              <a:rPr sz="1500">
+                <a:solidFill>
+                  <a:srgbClr val="22282E"/>
+                </a:solidFill>
+              </a:rPr>
+              <a:t>•  ❓ ¿El assumed breach no "hace trampa"?</a:t>
+            </a:r>
+          </a:p>
+          <a:p>
+            <a:pPr>
+              <a:spcAft>
+                <a:spcPts val="600"/>
+              </a:spcAft>
+            </a:pPr>
+            <a:r>
+              <a:rPr sz="1500">
+                <a:solidFill>
+                  <a:srgbClr val="22282E"/>
+                </a:solidFill>
+              </a:rPr>
+              <a:t>•  No: reconoce que el phishing eventualmente funciona y enfoca el presupuesto en lo que de verdad se quiere evaluar (¿detectamos y respondemos una vez dentro?).</a:t>
+            </a:r>
+          </a:p>
+        </p:txBody>
+      </p:sp>
+    </p:spTree>
+  </p:cSld>
+  <p:clrMapOvr>
+    <a:masterClrMapping/>
+  </p:clrMapOvr>
+</p:sld>
+</file>
+
+<file path=ppt/slides/slide14.xml><?xml version="1.0" encoding="utf-8"?>
+<p:sld xmlns:a="http://schemas.openxmlformats.org/drawingml/2006/main" xmlns:p="http://schemas.openxmlformats.org/presentationml/2006/main" xmlns:r="http://schemas.openxmlformats.org/officeDocument/2006/relationships">
+  <p:cSld>
+    <p:spTree>
+      <p:nvGrpSpPr>
+        <p:cNvPr id="1" name=""/>
+        <p:cNvGrpSpPr/>
+        <p:nvPr/>
+      </p:nvGrpSpPr>
+      <p:grpSpPr/>
+      <p:sp>
+        <p:nvSpPr>
+          <p:cNvPr id="2" name="TextBox 1"/>
+          <p:cNvSpPr txBox="1"/>
+          <p:nvPr/>
+        </p:nvSpPr>
+        <p:spPr>
+          <a:xfrm>
+            <a:off x="457200" y="320040"/>
+            <a:ext cx="8229600" cy="822960"/>
+          </a:xfrm>
+          <a:prstGeom prst="rect">
+            <a:avLst/>
+          </a:prstGeom>
+          <a:noFill/>
+        </p:spPr>
+        <p:txBody>
+          <a:bodyPr wrap="square">
+            <a:spAutoFit/>
+          </a:bodyPr>
+          <a:lstStyle/>
+          <a:p>
+            <a:r>
+              <a:rPr sz="2600" b="1">
+                <a:solidFill>
+                  <a:srgbClr val="0B3D2E"/>
+                </a:solidFill>
+              </a:rPr>
+              <a:t>🔗 Referencias</a:t>
+            </a:r>
+          </a:p>
+        </p:txBody>
+      </p:sp>
+      <p:sp>
+        <p:nvSpPr>
+          <p:cNvPr id="3" name="TextBox 2"/>
+          <p:cNvSpPr txBox="1"/>
+          <p:nvPr/>
+        </p:nvSpPr>
+        <p:spPr>
+          <a:xfrm>
+            <a:off x="457200" y="1280160"/>
+            <a:ext cx="8229600" cy="4937760"/>
+          </a:xfrm>
+          <a:prstGeom prst="rect">
+            <a:avLst/>
+          </a:prstGeom>
+          <a:noFill/>
+        </p:spPr>
+        <p:txBody>
+          <a:bodyPr wrap="square">
+            <a:spAutoFit/>
+          </a:bodyPr>
+          <a:lstStyle/>
+          <a:p>
+            <a:pPr>
+              <a:spcAft>
+                <a:spcPts val="600"/>
+              </a:spcAft>
+            </a:pPr>
+            <a:r>
+              <a:rPr sz="1500">
+                <a:solidFill>
+                  <a:srgbClr val="22282E"/>
+                </a:solidFill>
+              </a:rPr>
               <a:t>•  Vest, J. &amp; Tubberville, J. Red Team Development and Operations. &lt;https://redteam.guide/&gt;</a:t>
             </a:r>
           </a:p>
@@ -3599,6 +3870,81 @@
           </a:p>
         </p:txBody>
       </p:sp>
+    </p:spTree>
+  </p:cSld>
+  <p:clrMapOvr>
+    <a:masterClrMapping/>
+  </p:clrMapOvr>
+</p:sld>
+</file>
+
+<file path=ppt/slides/slide15.xml><?xml version="1.0" encoding="utf-8"?>
+<p:sld xmlns:a="http://schemas.openxmlformats.org/drawingml/2006/main" xmlns:p="http://schemas.openxmlformats.org/presentationml/2006/main" xmlns:r="http://schemas.openxmlformats.org/officeDocument/2006/relationships">
+  <p:cSld>
+    <p:spTree>
+      <p:nvGrpSpPr>
+        <p:cNvPr id="1" name=""/>
+        <p:cNvGrpSpPr/>
+        <p:nvPr/>
+      </p:nvGrpSpPr>
+      <p:grpSpPr/>
+      <p:sp>
+        <p:nvSpPr>
+          <p:cNvPr id="2" name="TextBox 1"/>
+          <p:cNvSpPr txBox="1"/>
+          <p:nvPr/>
+        </p:nvSpPr>
+        <p:spPr>
+          <a:xfrm>
+            <a:off x="457200" y="274320"/>
+            <a:ext cx="8229600" cy="640080"/>
+          </a:xfrm>
+          <a:prstGeom prst="rect">
+            <a:avLst/>
+          </a:prstGeom>
+          <a:noFill/>
+        </p:spPr>
+        <p:txBody>
+          <a:bodyPr wrap="square">
+            <a:spAutoFit/>
+          </a:bodyPr>
+          <a:lstStyle/>
+          <a:p>
+            <a:r>
+              <a:rPr sz="2200" b="1">
+                <a:solidFill>
+                  <a:srgbClr val="0B3D2E"/>
+                </a:solidFill>
+              </a:rPr>
+              <a:t>Diagrama de la clase</a:t>
+            </a:r>
+          </a:p>
+        </p:txBody>
+      </p:sp>
+      <p:pic>
+        <p:nvPicPr>
+          <p:cNvPr id="3" name="Picture 2" descr="ef7430bd8df687c7.png"/>
+          <p:cNvPicPr>
+            <a:picLocks noChangeAspect="1"/>
+          </p:cNvPicPr>
+          <p:nvPr/>
+        </p:nvPicPr>
+        <p:blipFill>
+          <a:blip r:embed="rId2"/>
+          <a:stretch>
+            <a:fillRect/>
+          </a:stretch>
+        </p:blipFill>
+        <p:spPr>
+          <a:xfrm>
+            <a:off x="457200" y="2834640"/>
+            <a:ext cx="8229600" cy="1828800"/>
+          </a:xfrm>
+          <a:prstGeom prst="rect">
+            <a:avLst/>
+          </a:prstGeom>
+        </p:spPr>
+      </p:pic>
     </p:spTree>
   </p:cSld>
   <p:clrMapOvr>
@@ -3683,7 +4029,7 @@
                   <a:srgbClr val="22282E"/>
                 </a:solidFill>
               </a:rPr>
-              <a:t>•  Entender qué distingue realmente a un ejercicio de Red Team de un pentest tradicional: no es "hacking más avanzado", sino un cambio de filosofía. El alumno aprenderá a encuadrar una operación adversarial en torno a objetivos de negocio, a definir Rules of Engagement (RoE) sólidas y a articular por qué emular a un adversario mejora la defensa mucho más que un listado de vulnerabilidades.</a:t>
+              <a:t>•  Entender qué distingue realmente a un ejercicio de Red Team de un pentest tradicional: no es "hacking más avanzado", sino un cambio de filosofía. El alumno aprenderá a encuadrar una operación…</a:t>
             </a:r>
           </a:p>
         </p:txBody>
@@ -4077,7 +4423,7 @@
                   <a:srgbClr val="0B3D2E"/>
                 </a:solidFill>
               </a:rPr>
-              <a:t>📖 Definiciones y características</a:t>
+              <a:t>🧠 Explicación en profundidad</a:t>
             </a:r>
           </a:p>
         </p:txBody>
@@ -4115,82 +4461,97 @@
                   <a:srgbClr val="22282E"/>
                 </a:solidFill>
               </a:rPr>
-              <a:t>•  Red Team: emulación de un adversario con objetivos concretos, priorizando sigilo y evaluación de la capacidad de detección y respuesta. Característica clave: mide a la defensa, no solo al sistema.</a:t>
-            </a:r>
-          </a:p>
-          <a:p>
-            <a:pPr>
-              <a:spcAft>
-                <a:spcPts val="600"/>
-              </a:spcAft>
-            </a:pPr>
-            <a:r>
-              <a:rPr sz="1500">
-                <a:solidFill>
-                  <a:srgbClr val="22282E"/>
-                </a:solidFill>
-              </a:rPr>
-              <a:t>•  Penetration test: evaluación técnica orientada a encontrar y demostrar el mayor número de vulnerabilidades explotables en un alcance. Característica: cobertura amplia, ruido aceptable.</a:t>
-            </a:r>
-          </a:p>
-          <a:p>
-            <a:pPr>
-              <a:spcAft>
-                <a:spcPts val="600"/>
-              </a:spcAft>
-            </a:pPr>
-            <a:r>
-              <a:rPr sz="1500">
-                <a:solidFill>
-                  <a:srgbClr val="22282E"/>
-                </a:solidFill>
-              </a:rPr>
-              <a:t>•  Rules of Engagement (RoE): documento que fija qué, cómo, cuándo y dónde se puede atacar, contactos de emergencia y límites. Característica: es el contrato operativo.</a:t>
-            </a:r>
-          </a:p>
-          <a:p>
-            <a:pPr>
-              <a:spcAft>
-                <a:spcPts val="600"/>
-              </a:spcAft>
-            </a:pPr>
-            <a:r>
-              <a:rPr sz="1500">
-                <a:solidFill>
-                  <a:srgbClr val="22282E"/>
-                </a:solidFill>
-              </a:rPr>
-              <a:t>•  Assumed breach: se parte de un punto de apoyo ya concedido (una workstation, un usuario) para centrarse en post-explotación. Característica: optimiza el tiempo hacia el objetivo.</a:t>
-            </a:r>
-          </a:p>
-          <a:p>
-            <a:pPr>
-              <a:spcAft>
-                <a:spcPts val="600"/>
-              </a:spcAft>
-            </a:pPr>
-            <a:r>
-              <a:rPr sz="1500">
-                <a:solidFill>
-                  <a:srgbClr val="22282E"/>
-                </a:solidFill>
-              </a:rPr>
-              <a:t>•  Crown jewels / flags: los activos o acciones que definen el éxito (ej. leer la base de datos de RRHH). Característica: convierten "hackear" en un objetivo verificable.</a:t>
-            </a:r>
-          </a:p>
-          <a:p>
-            <a:pPr>
-              <a:spcAft>
-                <a:spcPts val="600"/>
-              </a:spcAft>
-            </a:pPr>
-            <a:r>
-              <a:rPr sz="1500">
-                <a:solidFill>
-                  <a:srgbClr val="22282E"/>
-                </a:solidFill>
-              </a:rPr>
-              <a:t>•  White cell / trusted agent: personas informadas que supervisan el ejercicio y pueden pausarlo. Característica: red de seguridad del engagement.</a:t>
+              <a:t>•  No es que el Red Team sea "un pentest con hackers mejores". Es que responde a una pregunta distinta. El pentest pregunta "¿qué vulnerabilidades explotables hay en este alcance?"; el Red Team pregunta…</a:t>
+            </a:r>
+          </a:p>
+          <a:p>
+            <a:pPr>
+              <a:spcAft>
+                <a:spcPts val="600"/>
+              </a:spcAft>
+            </a:pPr>
+            <a:r>
+              <a:rPr sz="1500">
+                <a:solidFill>
+                  <a:srgbClr val="22282E"/>
+                </a:solidFill>
+              </a:rPr>
+              <a:t>•  Hay un continuo de madurez, no un ranking de dificultad:</a:t>
+            </a:r>
+          </a:p>
+          <a:p>
+            <a:pPr>
+              <a:spcAft>
+                <a:spcPts val="600"/>
+              </a:spcAft>
+            </a:pPr>
+            <a:r>
+              <a:rPr sz="1500">
+                <a:solidFill>
+                  <a:srgbClr val="22282E"/>
+                </a:solidFill>
+              </a:rPr>
+              <a:t>•  Servicio — Pregunta que responde</a:t>
+            </a:r>
+          </a:p>
+          <a:p>
+            <a:pPr>
+              <a:spcAft>
+                <a:spcPts val="600"/>
+              </a:spcAft>
+            </a:pPr>
+            <a:r>
+              <a:rPr sz="1500">
+                <a:solidFill>
+                  <a:srgbClr val="22282E"/>
+                </a:solidFill>
+              </a:rPr>
+              <a:t>•  Vulnerability Assessment — ¿Qué debilidades conocidas tengo?</a:t>
+            </a:r>
+          </a:p>
+          <a:p>
+            <a:pPr>
+              <a:spcAft>
+                <a:spcPts val="600"/>
+              </a:spcAft>
+            </a:pPr>
+            <a:r>
+              <a:rPr sz="1500">
+                <a:solidFill>
+                  <a:srgbClr val="22282E"/>
+                </a:solidFill>
+              </a:rPr>
+              <a:t>•  Penetration test — ¿Qué puede explotar un atacante aquí?</a:t>
+            </a:r>
+          </a:p>
+          <a:p>
+            <a:pPr>
+              <a:spcAft>
+                <a:spcPts val="600"/>
+              </a:spcAft>
+            </a:pPr>
+            <a:r>
+              <a:rPr sz="1500">
+                <a:solidFill>
+                  <a:srgbClr val="22282E"/>
+                </a:solidFill>
+              </a:rPr>
+              <a:t>•  Red Team — ¿Detectamos y respondemos a un adversario con objetivo?</a:t>
+            </a:r>
+          </a:p>
+          <a:p>
+            <a:pPr>
+              <a:spcAft>
+                <a:spcPts val="600"/>
+              </a:spcAft>
+            </a:pPr>
+            <a:r>
+              <a:rPr sz="1500">
+                <a:solidFill>
+                  <a:srgbClr val="22282E"/>
+                </a:solidFill>
+              </a:rPr>
+              <a:t>•  Cada uno es el correcto en un momento distinto de madurez. Un VA es la base; el pentest demuestra impacto; el Red Team solo aporta valor cuando ya existe una capacidad defensiva que medir.</a:t>
             </a:r>
           </a:p>
         </p:txBody>
@@ -4241,7 +4602,7 @@
                   <a:srgbClr val="0B3D2E"/>
                 </a:solidFill>
               </a:rPr>
-              <a:t>🧰 Herramientas y preparación</a:t>
+              <a:t>📖 Definiciones y características</a:t>
             </a:r>
           </a:p>
         </p:txBody>
@@ -4279,67 +4640,82 @@
                   <a:srgbClr val="22282E"/>
                 </a:solidFill>
               </a:rPr>
-              <a:t>•  Esta clase es de planificación; el "tooling" es documental. Prepara:</a:t>
-            </a:r>
-          </a:p>
-          <a:p>
-            <a:pPr>
-              <a:spcAft>
-                <a:spcPts val="600"/>
-              </a:spcAft>
-            </a:pPr>
-            <a:r>
-              <a:rPr sz="1500">
-                <a:solidFill>
-                  <a:srgbClr val="22282E"/>
-                </a:solidFill>
-              </a:rPr>
-              <a:t>•  Una plantilla de RoE y de plan de operación (puedes basarte en las de redteam.guide).</a:t>
-            </a:r>
-          </a:p>
-          <a:p>
-            <a:pPr>
-              <a:spcAft>
-                <a:spcPts val="600"/>
-              </a:spcAft>
-            </a:pPr>
-            <a:r>
-              <a:rPr sz="1500">
-                <a:solidFill>
-                  <a:srgbClr val="22282E"/>
-                </a:solidFill>
-              </a:rPr>
-              <a:t>•  Un cuaderno de operación (Obsidian, un repo Git privado o incluso Markdown) para registrar decisiones y tiempos.</a:t>
-            </a:r>
-          </a:p>
-          <a:p>
-            <a:pPr>
-              <a:spcAft>
-                <a:spcPts val="600"/>
-              </a:spcAft>
-            </a:pPr>
-            <a:r>
-              <a:rPr sz="1500">
-                <a:solidFill>
-                  <a:srgbClr val="22282E"/>
-                </a:solidFill>
-              </a:rPr>
-              <a:t>•  Acceso al catálogo de MITRE ATT&amp;CK para más adelante mapear las técnicas al plan.</a:t>
-            </a:r>
-          </a:p>
-          <a:p>
-            <a:pPr>
-              <a:spcAft>
-                <a:spcPts val="600"/>
-              </a:spcAft>
-            </a:pPr>
-            <a:r>
-              <a:rPr sz="1500">
-                <a:solidFill>
-                  <a:srgbClr val="22282E"/>
-                </a:solidFill>
-              </a:rPr>
-              <a:t>•  Un diagrama de la organización objetivo ficticia (usaremos "ACME Corp" como caso de estudio de laboratorio).</a:t>
+              <a:t>•  Red Team: emulación de un adversario con objetivos concretos, priorizando sigilo y evaluación de la capacidad de detección y respuesta. Característica clave: mide a la defensa, no solo al sistema.</a:t>
+            </a:r>
+          </a:p>
+          <a:p>
+            <a:pPr>
+              <a:spcAft>
+                <a:spcPts val="600"/>
+              </a:spcAft>
+            </a:pPr>
+            <a:r>
+              <a:rPr sz="1500">
+                <a:solidFill>
+                  <a:srgbClr val="22282E"/>
+                </a:solidFill>
+              </a:rPr>
+              <a:t>•  Penetration test: evaluación técnica orientada a encontrar y demostrar el mayor número de vulnerabilidades explotables en un alcance. Característica: cobertura amplia, ruido aceptable.</a:t>
+            </a:r>
+          </a:p>
+          <a:p>
+            <a:pPr>
+              <a:spcAft>
+                <a:spcPts val="600"/>
+              </a:spcAft>
+            </a:pPr>
+            <a:r>
+              <a:rPr sz="1500">
+                <a:solidFill>
+                  <a:srgbClr val="22282E"/>
+                </a:solidFill>
+              </a:rPr>
+              <a:t>•  Rules of Engagement (RoE): documento que fija qué, cómo, cuándo y dónde se puede atacar, contactos de emergencia y límites. Característica: es el contrato operativo.</a:t>
+            </a:r>
+          </a:p>
+          <a:p>
+            <a:pPr>
+              <a:spcAft>
+                <a:spcPts val="600"/>
+              </a:spcAft>
+            </a:pPr>
+            <a:r>
+              <a:rPr sz="1500">
+                <a:solidFill>
+                  <a:srgbClr val="22282E"/>
+                </a:solidFill>
+              </a:rPr>
+              <a:t>•  Assumed breach: se parte de un punto de apoyo ya concedido (una workstation, un usuario) para centrarse en post-explotación. Característica: optimiza el tiempo hacia el objetivo.</a:t>
+            </a:r>
+          </a:p>
+          <a:p>
+            <a:pPr>
+              <a:spcAft>
+                <a:spcPts val="600"/>
+              </a:spcAft>
+            </a:pPr>
+            <a:r>
+              <a:rPr sz="1500">
+                <a:solidFill>
+                  <a:srgbClr val="22282E"/>
+                </a:solidFill>
+              </a:rPr>
+              <a:t>•  Crown jewels / flags: los activos o acciones que definen el éxito (ej. leer la base de datos de RRHH). Característica: convierten "hackear" en un objetivo verificable.</a:t>
+            </a:r>
+          </a:p>
+          <a:p>
+            <a:pPr>
+              <a:spcAft>
+                <a:spcPts val="600"/>
+              </a:spcAft>
+            </a:pPr>
+            <a:r>
+              <a:rPr sz="1500">
+                <a:solidFill>
+                  <a:srgbClr val="22282E"/>
+                </a:solidFill>
+              </a:rPr>
+              <a:t>•  White cell / trusted agent: personas informadas que supervisan el ejercicio y pueden pausarlo. Característica: red de seguridad del engagement.</a:t>
             </a:r>
           </a:p>
         </p:txBody>
@@ -4390,7 +4766,7 @@
                   <a:srgbClr val="0B3D2E"/>
                 </a:solidFill>
               </a:rPr>
-              <a:t>🧪 Laboratorio guiado (ejercicio aplicado)</a:t>
+              <a:t>📔 Glosario</a:t>
             </a:r>
           </a:p>
         </p:txBody>
@@ -4428,97 +4804,97 @@
                   <a:srgbClr val="22282E"/>
                 </a:solidFill>
               </a:rPr>
-              <a:t>•  Como esta clase es conceptual, el laboratorio es un taller de planificación de un ejercicio para "ACME Corp":</a:t>
-            </a:r>
-          </a:p>
-          <a:p>
-            <a:pPr>
-              <a:spcAft>
-                <a:spcPts val="600"/>
-              </a:spcAft>
-            </a:pPr>
-            <a:r>
-              <a:rPr sz="1500">
-                <a:solidFill>
-                  <a:srgbClr val="22282E"/>
-                </a:solidFill>
-              </a:rPr>
-              <a:t>•  Define el objetivo de negocio. Escribe una frase única: "Demostrar si un atacante externo puede acceder a la base de datos de nómina en 3 semanas sin ser detectado."</a:t>
-            </a:r>
-          </a:p>
-          <a:p>
-            <a:pPr>
-              <a:spcAft>
-                <a:spcPts val="600"/>
-              </a:spcAft>
-            </a:pPr>
-            <a:r>
-              <a:rPr sz="1500">
-                <a:solidFill>
-                  <a:srgbClr val="22282E"/>
-                </a:solidFill>
-              </a:rPr>
-              <a:t>•  Traduce a flags técnicas. Deriva metas verificables: (a) acceso a un endpoint de finanzas, (b) credenciales de un DBA, (c) lectura de una tabla marcada como señuelo.</a:t>
-            </a:r>
-          </a:p>
-          <a:p>
-            <a:pPr>
-              <a:spcAft>
-                <a:spcPts val="600"/>
-              </a:spcAft>
-            </a:pPr>
-            <a:r>
-              <a:rPr sz="1500">
-                <a:solidFill>
-                  <a:srgbClr val="22282E"/>
-                </a:solidFill>
-              </a:rPr>
-              <a:t>•  Elige el punto de partida. Decide entre external (desde internet) o assumed breach (workstation ya comprometida) y justifica la elección según lo que la organización quiere evaluar.</a:t>
-            </a:r>
-          </a:p>
-          <a:p>
-            <a:pPr>
-              <a:spcAft>
-                <a:spcPts val="600"/>
-              </a:spcAft>
-            </a:pPr>
-            <a:r>
-              <a:rPr sz="1500">
-                <a:solidFill>
-                  <a:srgbClr val="22282E"/>
-                </a:solidFill>
-              </a:rPr>
-              <a:t>•  Redacta las RoE mínimas. Ventana horaria, sistemas fuera de alcance (producción crítica, dispositivos médicos), técnicas prohibidas (DoS, ransomware real), y contactos de escalado.</a:t>
-            </a:r>
-          </a:p>
-          <a:p>
-            <a:pPr>
-              <a:spcAft>
-                <a:spcPts val="600"/>
-              </a:spcAft>
-            </a:pPr>
-            <a:r>
-              <a:rPr sz="1500">
-                <a:solidFill>
-                  <a:srgbClr val="22282E"/>
-                </a:solidFill>
-              </a:rPr>
-              <a:t>•  Define señales de detección esperadas. Lista qué eventos debería generar cada fase y quién en el Blue Team debería verlos.</a:t>
-            </a:r>
-          </a:p>
-          <a:p>
-            <a:pPr>
-              <a:spcAft>
-                <a:spcPts val="600"/>
-              </a:spcAft>
-            </a:pPr>
-            <a:r>
-              <a:rPr sz="1500">
-                <a:solidFill>
-                  <a:srgbClr val="22282E"/>
-                </a:solidFill>
-              </a:rPr>
-              <a:t>•  Establece las métricas. Tiempo-a-detección (TTD), tiempo-a-respuesta (TTR), y porcentaje de técnicas detectadas.</a:t>
+              <a:t>•  Término — Definición concisa</a:t>
+            </a:r>
+          </a:p>
+          <a:p>
+            <a:pPr>
+              <a:spcAft>
+                <a:spcPts val="600"/>
+              </a:spcAft>
+            </a:pPr>
+            <a:r>
+              <a:rPr sz="1500">
+                <a:solidFill>
+                  <a:srgbClr val="22282E"/>
+                </a:solidFill>
+              </a:rPr>
+              <a:t>•  Red Team — Emulación de un adversario con objetivo para medir detección y respuesta</a:t>
+            </a:r>
+          </a:p>
+          <a:p>
+            <a:pPr>
+              <a:spcAft>
+                <a:spcPts val="600"/>
+              </a:spcAft>
+            </a:pPr>
+            <a:r>
+              <a:rPr sz="1500">
+                <a:solidFill>
+                  <a:srgbClr val="22282E"/>
+                </a:solidFill>
+              </a:rPr>
+              <a:t>•  Penetration test — Evaluación técnica que busca demostrar el máximo de vías explotables</a:t>
+            </a:r>
+          </a:p>
+          <a:p>
+            <a:pPr>
+              <a:spcAft>
+                <a:spcPts val="600"/>
+              </a:spcAft>
+            </a:pPr>
+            <a:r>
+              <a:rPr sz="1500">
+                <a:solidFill>
+                  <a:srgbClr val="22282E"/>
+                </a:solidFill>
+              </a:rPr>
+              <a:t>•  Vulnerability Assessment (VA) — Inventario de debilidades conocidas, sin explotación profunda</a:t>
+            </a:r>
+          </a:p>
+          <a:p>
+            <a:pPr>
+              <a:spcAft>
+                <a:spcPts val="600"/>
+              </a:spcAft>
+            </a:pPr>
+            <a:r>
+              <a:rPr sz="1500">
+                <a:solidFill>
+                  <a:srgbClr val="22282E"/>
+                </a:solidFill>
+              </a:rPr>
+              <a:t>•  Crown jewels — Activos críticos cuyo compromiso define el éxito del ejercicio</a:t>
+            </a:r>
+          </a:p>
+          <a:p>
+            <a:pPr>
+              <a:spcAft>
+                <a:spcPts val="600"/>
+              </a:spcAft>
+            </a:pPr>
+            <a:r>
+              <a:rPr sz="1500">
+                <a:solidFill>
+                  <a:srgbClr val="22282E"/>
+                </a:solidFill>
+              </a:rPr>
+              <a:t>•  Flag — Meta técnica verificable derivada del objetivo de negocio</a:t>
+            </a:r>
+          </a:p>
+          <a:p>
+            <a:pPr>
+              <a:spcAft>
+                <a:spcPts val="600"/>
+              </a:spcAft>
+            </a:pPr>
+            <a:r>
+              <a:rPr sz="1500">
+                <a:solidFill>
+                  <a:srgbClr val="22282E"/>
+                </a:solidFill>
+              </a:rPr>
+              <a:t>•  Rules of Engagement (RoE) — Contrato que fija alcance, técnicas permitidas, ventanas y contactos</a:t>
             </a:r>
           </a:p>
         </p:txBody>
@@ -4569,7 +4945,7 @@
                   <a:srgbClr val="0B3D2E"/>
                 </a:solidFill>
               </a:rPr>
-              <a:t>✍️ Ejercicios</a:t>
+              <a:t>🧰 Herramientas y preparación</a:t>
             </a:r>
           </a:p>
         </p:txBody>
@@ -4607,82 +4983,67 @@
                   <a:srgbClr val="22282E"/>
                 </a:solidFill>
               </a:rPr>
-              <a:t>•  Escribe en una tabla las 5 diferencias más importantes entre pentest y Red Team.</a:t>
-            </a:r>
-          </a:p>
-          <a:p>
-            <a:pPr>
-              <a:spcAft>
-                <a:spcPts val="600"/>
-              </a:spcAft>
-            </a:pPr>
-            <a:r>
-              <a:rPr sz="1500">
-                <a:solidFill>
-                  <a:srgbClr val="22282E"/>
-                </a:solidFill>
-              </a:rPr>
-              <a:t>•  Redacta un objetivo de negocio y tres flags técnicas derivadas para una empresa de e-commerce.</a:t>
-            </a:r>
-          </a:p>
-          <a:p>
-            <a:pPr>
-              <a:spcAft>
-                <a:spcPts val="600"/>
-              </a:spcAft>
-            </a:pPr>
-            <a:r>
-              <a:rPr sz="1500">
-                <a:solidFill>
-                  <a:srgbClr val="22282E"/>
-                </a:solidFill>
-              </a:rPr>
-              <a:t>•  Enumera 8 cláusulas que consideres imprescindibles en unas RoE y justifica dos de ellas.</a:t>
-            </a:r>
-          </a:p>
-          <a:p>
-            <a:pPr>
-              <a:spcAft>
-                <a:spcPts val="600"/>
-              </a:spcAft>
-            </a:pPr>
-            <a:r>
-              <a:rPr sz="1500">
-                <a:solidFill>
-                  <a:srgbClr val="22282E"/>
-                </a:solidFill>
-              </a:rPr>
-              <a:t>•  Argumenta cuándo un assumed breach es mejor que un ataque desde cero, con un ejemplo.</a:t>
-            </a:r>
-          </a:p>
-          <a:p>
-            <a:pPr>
-              <a:spcAft>
-                <a:spcPts val="600"/>
-              </a:spcAft>
-            </a:pPr>
-            <a:r>
-              <a:rPr sz="1500">
-                <a:solidFill>
-                  <a:srgbClr val="22282E"/>
-                </a:solidFill>
-              </a:rPr>
-              <a:t>•  Diseña una tabla de métricas (TTD/TTR/cobertura) con valores objetivo razonables.</a:t>
-            </a:r>
-          </a:p>
-          <a:p>
-            <a:pPr>
-              <a:spcAft>
-                <a:spcPts val="600"/>
-              </a:spcAft>
-            </a:pPr>
-            <a:r>
-              <a:rPr sz="1500">
-                <a:solidFill>
-                  <a:srgbClr val="22282E"/>
-                </a:solidFill>
-              </a:rPr>
-              <a:t>•  Explica qué es la "deconfliction" y describe un procedimiento para evitar un incidente real innecesario.</a:t>
+              <a:t>•  Esta clase es de planificación; el "tooling" es documental. Prepara:</a:t>
+            </a:r>
+          </a:p>
+          <a:p>
+            <a:pPr>
+              <a:spcAft>
+                <a:spcPts val="600"/>
+              </a:spcAft>
+            </a:pPr>
+            <a:r>
+              <a:rPr sz="1500">
+                <a:solidFill>
+                  <a:srgbClr val="22282E"/>
+                </a:solidFill>
+              </a:rPr>
+              <a:t>•  Una plantilla de RoE y de plan de operación (puedes basarte en las de redteam.guide).</a:t>
+            </a:r>
+          </a:p>
+          <a:p>
+            <a:pPr>
+              <a:spcAft>
+                <a:spcPts val="600"/>
+              </a:spcAft>
+            </a:pPr>
+            <a:r>
+              <a:rPr sz="1500">
+                <a:solidFill>
+                  <a:srgbClr val="22282E"/>
+                </a:solidFill>
+              </a:rPr>
+              <a:t>•  Un cuaderno de operación (Obsidian, un repo Git privado o incluso Markdown) para registrar decisiones y tiempos.</a:t>
+            </a:r>
+          </a:p>
+          <a:p>
+            <a:pPr>
+              <a:spcAft>
+                <a:spcPts val="600"/>
+              </a:spcAft>
+            </a:pPr>
+            <a:r>
+              <a:rPr sz="1500">
+                <a:solidFill>
+                  <a:srgbClr val="22282E"/>
+                </a:solidFill>
+              </a:rPr>
+              <a:t>•  Acceso al catálogo de MITRE ATT&amp;CK para más adelante mapear las técnicas al plan.</a:t>
+            </a:r>
+          </a:p>
+          <a:p>
+            <a:pPr>
+              <a:spcAft>
+                <a:spcPts val="600"/>
+              </a:spcAft>
+            </a:pPr>
+            <a:r>
+              <a:rPr sz="1500">
+                <a:solidFill>
+                  <a:srgbClr val="22282E"/>
+                </a:solidFill>
+              </a:rPr>
+              <a:t>•  Un diagrama de la organización objetivo ficticia (usaremos "ACME Corp" como caso de estudio de laboratorio).</a:t>
             </a:r>
           </a:p>
         </p:txBody>
@@ -4733,7 +5094,7 @@
                   <a:srgbClr val="0B3D2E"/>
                 </a:solidFill>
               </a:rPr>
-              <a:t>📝 Reto verificable</a:t>
+              <a:t>🧪 Laboratorio guiado (ejercicio aplicado)</a:t>
             </a:r>
           </a:p>
         </p:txBody>
@@ -4771,22 +5132,97 @@
                   <a:srgbClr val="22282E"/>
                 </a:solidFill>
               </a:rPr>
-              <a:t>•  Produce un documento de una página ("Operation Charter") para ACME Corp que contenga: objetivo de negocio, 3 flags, tipo de inicio, 6 RoE, un plan de deconfliction y 3 métricas de éxito.</a:t>
-            </a:r>
-          </a:p>
-          <a:p>
-            <a:pPr>
-              <a:spcAft>
-                <a:spcPts val="600"/>
-              </a:spcAft>
-            </a:pPr>
-            <a:r>
-              <a:rPr sz="1500">
-                <a:solidFill>
-                  <a:srgbClr val="22282E"/>
-                </a:solidFill>
-              </a:rPr>
-              <a:t>•  Criterio de aceptación: cualquier persona ajena podría leerlo y saber qué está autorizado, qué se persigue y cómo se medirá el éxito, sin ambigüedad.</a:t>
+              <a:t>•  Como esta clase es conceptual, el laboratorio es un taller de planificación de un ejercicio para "ACME Corp":</a:t>
+            </a:r>
+          </a:p>
+          <a:p>
+            <a:pPr>
+              <a:spcAft>
+                <a:spcPts val="600"/>
+              </a:spcAft>
+            </a:pPr>
+            <a:r>
+              <a:rPr sz="1500">
+                <a:solidFill>
+                  <a:srgbClr val="22282E"/>
+                </a:solidFill>
+              </a:rPr>
+              <a:t>•  Define el objetivo de negocio. Escribe una frase única: "Demostrar si un atacante externo puede acceder a la base de datos de nómina en 3 semanas sin ser detectado."</a:t>
+            </a:r>
+          </a:p>
+          <a:p>
+            <a:pPr>
+              <a:spcAft>
+                <a:spcPts val="600"/>
+              </a:spcAft>
+            </a:pPr>
+            <a:r>
+              <a:rPr sz="1500">
+                <a:solidFill>
+                  <a:srgbClr val="22282E"/>
+                </a:solidFill>
+              </a:rPr>
+              <a:t>•  Traduce a flags técnicas. Deriva metas verificables: (a) acceso a un endpoint de finanzas, (b) credenciales de un DBA, (c) lectura de una tabla marcada como señuelo.</a:t>
+            </a:r>
+          </a:p>
+          <a:p>
+            <a:pPr>
+              <a:spcAft>
+                <a:spcPts val="600"/>
+              </a:spcAft>
+            </a:pPr>
+            <a:r>
+              <a:rPr sz="1500">
+                <a:solidFill>
+                  <a:srgbClr val="22282E"/>
+                </a:solidFill>
+              </a:rPr>
+              <a:t>•  Elige el punto de partida. Decide entre external (desde internet) o assumed breach (workstation ya comprometida) y justifica la elección según lo que la organización quiere evaluar.</a:t>
+            </a:r>
+          </a:p>
+          <a:p>
+            <a:pPr>
+              <a:spcAft>
+                <a:spcPts val="600"/>
+              </a:spcAft>
+            </a:pPr>
+            <a:r>
+              <a:rPr sz="1500">
+                <a:solidFill>
+                  <a:srgbClr val="22282E"/>
+                </a:solidFill>
+              </a:rPr>
+              <a:t>•  Redacta las RoE mínimas. Ventana horaria, sistemas fuera de alcance (producción crítica, dispositivos médicos), técnicas prohibidas (DoS, ransomware real), y contactos de escalado.</a:t>
+            </a:r>
+          </a:p>
+          <a:p>
+            <a:pPr>
+              <a:spcAft>
+                <a:spcPts val="600"/>
+              </a:spcAft>
+            </a:pPr>
+            <a:r>
+              <a:rPr sz="1500">
+                <a:solidFill>
+                  <a:srgbClr val="22282E"/>
+                </a:solidFill>
+              </a:rPr>
+              <a:t>•  Define señales de detección esperadas. Lista qué eventos debería generar cada fase y quién en el Blue Team debería verlos.</a:t>
+            </a:r>
+          </a:p>
+          <a:p>
+            <a:pPr>
+              <a:spcAft>
+                <a:spcPts val="600"/>
+              </a:spcAft>
+            </a:pPr>
+            <a:r>
+              <a:rPr sz="1500">
+                <a:solidFill>
+                  <a:srgbClr val="22282E"/>
+                </a:solidFill>
+              </a:rPr>
+              <a:t>•  Establece las métricas. Tiempo-a-detección (TTD), tiempo-a-respuesta (TTR), y porcentaje de técnicas detectadas.</a:t>
             </a:r>
           </a:p>
         </p:txBody>
